--- a/representative_transformation.pptx
+++ b/representative_transformation.pptx
@@ -6845,53 +6845,14 @@
       </p:sp>
       <p:sp>
         <p:nvSpPr>
-          <p:cNvPr id="9" name="TextBox 8"/>
-          <p:cNvSpPr txBox="1"/>
-          <p:nvPr/>
-        </p:nvSpPr>
-        <p:spPr>
-          <a:xfrm>
-            <a:off x="731520" y="987552"/>
-            <a:ext cx="5303520" cy="219456"/>
-          </a:xfrm>
-          <a:prstGeom prst="rect">
-            <a:avLst/>
-          </a:prstGeom>
-          <a:noFill/>
-        </p:spPr>
-        <p:txBody>
-          <a:bodyPr wrap="none" lIns="0" tIns="0" rIns="0" bIns="0">
-            <a:spAutoFit/>
-          </a:bodyPr>
-          <a:lstStyle/>
-          <a:p>
-            <a:pPr>
-              <a:spcAft>
-                <a:spcPts val="200"/>
-              </a:spcAft>
-            </a:pPr>
-            <a:r>
-              <a:rPr sz="850" b="1" i="0">
-                <a:solidFill>
-                  <a:srgbClr val="0066CC"/>
-                </a:solidFill>
-                <a:latin typeface="Inter"/>
-              </a:rPr>
-              <a:t>1. WHAT CHANGED? (EXECUTIVE KPI TRAJECTORY)</a:t>
-            </a:r>
-          </a:p>
-        </p:txBody>
-      </p:sp>
-      <p:sp>
-        <p:nvSpPr>
-          <p:cNvPr id="10" name="Rectangle 9"/>
+          <p:cNvPr id="9" name="Rectangle 8"/>
           <p:cNvSpPr/>
           <p:nvPr/>
         </p:nvSpPr>
         <p:spPr>
           <a:xfrm>
-            <a:off x="731520" y="1188720"/>
-            <a:ext cx="2545003" cy="1051560"/>
+            <a:off x="731520" y="1243584"/>
+            <a:ext cx="2545003" cy="987552"/>
           </a:xfrm>
           <a:prstGeom prst="rect">
             <a:avLst/>
@@ -6929,14 +6890,14 @@
       </p:sp>
       <p:sp>
         <p:nvSpPr>
-          <p:cNvPr id="11" name="TextBox 10"/>
+          <p:cNvPr id="10" name="TextBox 9"/>
           <p:cNvSpPr txBox="1"/>
           <p:nvPr/>
         </p:nvSpPr>
         <p:spPr>
           <a:xfrm>
-            <a:off x="859536" y="1298448"/>
-            <a:ext cx="2288971" cy="832103"/>
+            <a:off x="859536" y="1353312"/>
+            <a:ext cx="2288971" cy="768096"/>
           </a:xfrm>
           <a:prstGeom prst="rect">
             <a:avLst/>
@@ -6995,14 +6956,14 @@
       </p:sp>
       <p:sp>
         <p:nvSpPr>
-          <p:cNvPr id="12" name="Rectangle 11"/>
+          <p:cNvPr id="11" name="Rectangle 10"/>
           <p:cNvSpPr/>
           <p:nvPr/>
         </p:nvSpPr>
         <p:spPr>
           <a:xfrm>
-            <a:off x="3459403" y="1188720"/>
-            <a:ext cx="2545003" cy="1051560"/>
+            <a:off x="3459403" y="1243584"/>
+            <a:ext cx="2545003" cy="987552"/>
           </a:xfrm>
           <a:prstGeom prst="rect">
             <a:avLst/>
@@ -7040,14 +7001,14 @@
       </p:sp>
       <p:sp>
         <p:nvSpPr>
-          <p:cNvPr id="13" name="TextBox 12"/>
+          <p:cNvPr id="12" name="TextBox 11"/>
           <p:cNvSpPr txBox="1"/>
           <p:nvPr/>
         </p:nvSpPr>
         <p:spPr>
           <a:xfrm>
-            <a:off x="3587419" y="1298448"/>
-            <a:ext cx="2288971" cy="832103"/>
+            <a:off x="3587419" y="1353312"/>
+            <a:ext cx="2288971" cy="768096"/>
           </a:xfrm>
           <a:prstGeom prst="rect">
             <a:avLst/>
@@ -7106,14 +7067,14 @@
       </p:sp>
       <p:sp>
         <p:nvSpPr>
-          <p:cNvPr id="14" name="Rectangle 13"/>
+          <p:cNvPr id="13" name="Rectangle 12"/>
           <p:cNvSpPr/>
           <p:nvPr/>
         </p:nvSpPr>
         <p:spPr>
           <a:xfrm>
-            <a:off x="6187287" y="1188720"/>
-            <a:ext cx="2545003" cy="1051560"/>
+            <a:off x="6187287" y="1243584"/>
+            <a:ext cx="2545003" cy="987552"/>
           </a:xfrm>
           <a:prstGeom prst="rect">
             <a:avLst/>
@@ -7151,14 +7112,14 @@
       </p:sp>
       <p:sp>
         <p:nvSpPr>
-          <p:cNvPr id="15" name="TextBox 14"/>
+          <p:cNvPr id="14" name="TextBox 13"/>
           <p:cNvSpPr txBox="1"/>
           <p:nvPr/>
         </p:nvSpPr>
         <p:spPr>
           <a:xfrm>
-            <a:off x="6315303" y="1298448"/>
-            <a:ext cx="2288971" cy="832103"/>
+            <a:off x="6315303" y="1353312"/>
+            <a:ext cx="2288971" cy="768096"/>
           </a:xfrm>
           <a:prstGeom prst="rect">
             <a:avLst/>
@@ -7217,14 +7178,14 @@
       </p:sp>
       <p:sp>
         <p:nvSpPr>
-          <p:cNvPr id="16" name="Rectangle 15"/>
+          <p:cNvPr id="15" name="Rectangle 14"/>
           <p:cNvSpPr/>
           <p:nvPr/>
         </p:nvSpPr>
         <p:spPr>
           <a:xfrm>
-            <a:off x="8915171" y="1188720"/>
-            <a:ext cx="2545003" cy="1051560"/>
+            <a:off x="8915171" y="1243584"/>
+            <a:ext cx="2545003" cy="987552"/>
           </a:xfrm>
           <a:prstGeom prst="rect">
             <a:avLst/>
@@ -7262,14 +7223,14 @@
       </p:sp>
       <p:sp>
         <p:nvSpPr>
-          <p:cNvPr id="17" name="TextBox 16"/>
+          <p:cNvPr id="16" name="TextBox 15"/>
           <p:cNvSpPr txBox="1"/>
           <p:nvPr/>
         </p:nvSpPr>
         <p:spPr>
           <a:xfrm>
-            <a:off x="9043187" y="1298448"/>
-            <a:ext cx="2288971" cy="832103"/>
+            <a:off x="9043187" y="1353312"/>
+            <a:ext cx="2288971" cy="768096"/>
           </a:xfrm>
           <a:prstGeom prst="rect">
             <a:avLst/>
@@ -7328,13 +7289,13 @@
       </p:sp>
       <p:sp>
         <p:nvSpPr>
-          <p:cNvPr id="18" name="TextBox 17"/>
+          <p:cNvPr id="17" name="TextBox 16"/>
           <p:cNvSpPr txBox="1"/>
           <p:nvPr/>
         </p:nvSpPr>
         <p:spPr>
           <a:xfrm>
-            <a:off x="731520" y="2331720"/>
+            <a:off x="731520" y="2322576"/>
             <a:ext cx="5303520" cy="219456"/>
           </a:xfrm>
           <a:prstGeom prst="rect">
@@ -7367,14 +7328,14 @@
       </p:sp>
       <p:graphicFrame>
         <p:nvGraphicFramePr>
-          <p:cNvPr id="19" name="Chart 18"/>
+          <p:cNvPr id="18" name="Chart 17"/>
           <p:cNvGraphicFramePr>
             <a:graphicFrameLocks noGrp="1"/>
           </p:cNvGraphicFramePr>
           <p:nvPr/>
         </p:nvGraphicFramePr>
         <p:xfrm>
-          <a:off x="731520" y="2532888"/>
+          <a:off x="731520" y="2523744"/>
           <a:ext cx="5250027" cy="2240280"/>
         </p:xfrm>
         <a:graphic>
@@ -7385,13 +7346,13 @@
       </p:graphicFrame>
       <p:sp>
         <p:nvSpPr>
-          <p:cNvPr id="20" name="TextBox 19"/>
+          <p:cNvPr id="19" name="TextBox 18"/>
           <p:cNvSpPr txBox="1"/>
           <p:nvPr/>
         </p:nvSpPr>
         <p:spPr>
           <a:xfrm>
-            <a:off x="6210147" y="2331720"/>
+            <a:off x="6210147" y="2322576"/>
             <a:ext cx="5303520" cy="219456"/>
           </a:xfrm>
           <a:prstGeom prst="rect">
@@ -7424,13 +7385,13 @@
       </p:sp>
       <p:sp>
         <p:nvSpPr>
-          <p:cNvPr id="21" name="Rectangle 20"/>
+          <p:cNvPr id="20" name="Rectangle 19"/>
           <p:cNvSpPr/>
           <p:nvPr/>
         </p:nvSpPr>
         <p:spPr>
           <a:xfrm>
-            <a:off x="6210147" y="2532888"/>
+            <a:off x="6210147" y="2523744"/>
             <a:ext cx="1141056" cy="2240280"/>
           </a:xfrm>
           <a:prstGeom prst="rect">
@@ -7469,14 +7430,14 @@
       </p:sp>
       <p:sp>
         <p:nvSpPr>
-          <p:cNvPr id="22" name="TextBox 21"/>
+          <p:cNvPr id="21" name="TextBox 20"/>
           <p:cNvSpPr txBox="1"/>
           <p:nvPr/>
         </p:nvSpPr>
         <p:spPr>
           <a:xfrm>
-            <a:off x="6338163" y="2660904"/>
-            <a:ext cx="885024" cy="1984248"/>
+            <a:off x="6283299" y="2633472"/>
+            <a:ext cx="994752" cy="2020824"/>
           </a:xfrm>
           <a:prstGeom prst="rect">
             <a:avLst/>
@@ -7484,7 +7445,7 @@
           <a:noFill/>
         </p:spPr>
         <p:txBody>
-          <a:bodyPr wrap="square">
+          <a:bodyPr wrap="square" lIns="0" rIns="0" tIns="0" bIns="0">
             <a:spAutoFit/>
           </a:bodyPr>
           <a:lstStyle/>
@@ -7507,11 +7468,11 @@
           <a:p>
             <a:pPr>
               <a:spcAft>
-                <a:spcPts val="400"/>
+                <a:spcPts val="200"/>
               </a:spcAft>
             </a:pPr>
             <a:r>
-              <a:rPr sz="2400" b="1" i="0">
+              <a:rPr sz="1700" b="1" i="0">
                 <a:solidFill>
                   <a:srgbClr val="0F172A"/>
                 </a:solidFill>
@@ -7535,13 +7496,13 @@
       </p:sp>
       <p:sp>
         <p:nvSpPr>
-          <p:cNvPr id="23" name="Rectangle 22"/>
+          <p:cNvPr id="22" name="Rectangle 21"/>
           <p:cNvSpPr/>
           <p:nvPr/>
         </p:nvSpPr>
         <p:spPr>
           <a:xfrm>
-            <a:off x="7579804" y="2532888"/>
+            <a:off x="7579804" y="2523744"/>
             <a:ext cx="1141056" cy="2240280"/>
           </a:xfrm>
           <a:prstGeom prst="rect">
@@ -7580,14 +7541,14 @@
       </p:sp>
       <p:sp>
         <p:nvSpPr>
-          <p:cNvPr id="24" name="TextBox 23"/>
+          <p:cNvPr id="23" name="TextBox 22"/>
           <p:cNvSpPr txBox="1"/>
           <p:nvPr/>
         </p:nvSpPr>
         <p:spPr>
           <a:xfrm>
-            <a:off x="7707820" y="2660904"/>
-            <a:ext cx="885024" cy="1984248"/>
+            <a:off x="7652956" y="2633472"/>
+            <a:ext cx="994752" cy="2020824"/>
           </a:xfrm>
           <a:prstGeom prst="rect">
             <a:avLst/>
@@ -7595,7 +7556,7 @@
           <a:noFill/>
         </p:spPr>
         <p:txBody>
-          <a:bodyPr wrap="square">
+          <a:bodyPr wrap="square" lIns="0" rIns="0" tIns="0" bIns="0">
             <a:spAutoFit/>
           </a:bodyPr>
           <a:lstStyle/>
@@ -7618,11 +7579,11 @@
           <a:p>
             <a:pPr>
               <a:spcAft>
-                <a:spcPts val="400"/>
+                <a:spcPts val="200"/>
               </a:spcAft>
             </a:pPr>
             <a:r>
-              <a:rPr sz="2400" b="1" i="0">
+              <a:rPr sz="1700" b="1" i="0">
                 <a:solidFill>
                   <a:srgbClr val="0F172A"/>
                 </a:solidFill>
@@ -7646,13 +7607,13 @@
       </p:sp>
       <p:sp>
         <p:nvSpPr>
-          <p:cNvPr id="25" name="Rectangle 24"/>
+          <p:cNvPr id="24" name="Rectangle 23"/>
           <p:cNvSpPr/>
           <p:nvPr/>
         </p:nvSpPr>
         <p:spPr>
           <a:xfrm>
-            <a:off x="8949461" y="2532888"/>
+            <a:off x="8949461" y="2523744"/>
             <a:ext cx="1141056" cy="2240280"/>
           </a:xfrm>
           <a:prstGeom prst="rect">
@@ -7691,14 +7652,14 @@
       </p:sp>
       <p:sp>
         <p:nvSpPr>
-          <p:cNvPr id="26" name="TextBox 25"/>
+          <p:cNvPr id="25" name="TextBox 24"/>
           <p:cNvSpPr txBox="1"/>
           <p:nvPr/>
         </p:nvSpPr>
         <p:spPr>
           <a:xfrm>
-            <a:off x="9077477" y="2660904"/>
-            <a:ext cx="885024" cy="1984248"/>
+            <a:off x="9022613" y="2633472"/>
+            <a:ext cx="994752" cy="2020824"/>
           </a:xfrm>
           <a:prstGeom prst="rect">
             <a:avLst/>
@@ -7706,7 +7667,7 @@
           <a:noFill/>
         </p:spPr>
         <p:txBody>
-          <a:bodyPr wrap="square">
+          <a:bodyPr wrap="square" lIns="0" rIns="0" tIns="0" bIns="0">
             <a:spAutoFit/>
           </a:bodyPr>
           <a:lstStyle/>
@@ -7729,11 +7690,11 @@
           <a:p>
             <a:pPr>
               <a:spcAft>
-                <a:spcPts val="400"/>
+                <a:spcPts val="200"/>
               </a:spcAft>
             </a:pPr>
             <a:r>
-              <a:rPr sz="2400" b="1" i="0">
+              <a:rPr sz="1700" b="1" i="0">
                 <a:solidFill>
                   <a:srgbClr val="0F172A"/>
                 </a:solidFill>
@@ -7757,13 +7718,13 @@
       </p:sp>
       <p:sp>
         <p:nvSpPr>
-          <p:cNvPr id="27" name="Rectangle 26"/>
+          <p:cNvPr id="26" name="Rectangle 25"/>
           <p:cNvSpPr/>
           <p:nvPr/>
         </p:nvSpPr>
         <p:spPr>
           <a:xfrm>
-            <a:off x="10319118" y="2532888"/>
+            <a:off x="10319118" y="2523744"/>
             <a:ext cx="1141056" cy="2240280"/>
           </a:xfrm>
           <a:prstGeom prst="rect">
@@ -7802,14 +7763,14 @@
       </p:sp>
       <p:sp>
         <p:nvSpPr>
-          <p:cNvPr id="28" name="TextBox 27"/>
+          <p:cNvPr id="27" name="TextBox 26"/>
           <p:cNvSpPr txBox="1"/>
           <p:nvPr/>
         </p:nvSpPr>
         <p:spPr>
           <a:xfrm>
-            <a:off x="10447134" y="2660904"/>
-            <a:ext cx="885024" cy="1984248"/>
+            <a:off x="10392270" y="2633472"/>
+            <a:ext cx="994752" cy="2020824"/>
           </a:xfrm>
           <a:prstGeom prst="rect">
             <a:avLst/>
@@ -7817,7 +7778,7 @@
           <a:noFill/>
         </p:spPr>
         <p:txBody>
-          <a:bodyPr wrap="square">
+          <a:bodyPr wrap="square" lIns="0" rIns="0" tIns="0" bIns="0">
             <a:spAutoFit/>
           </a:bodyPr>
           <a:lstStyle/>
@@ -7840,11 +7801,11 @@
           <a:p>
             <a:pPr>
               <a:spcAft>
-                <a:spcPts val="400"/>
+                <a:spcPts val="200"/>
               </a:spcAft>
             </a:pPr>
             <a:r>
-              <a:rPr sz="2400" b="1" i="0">
+              <a:rPr sz="1700" b="1" i="0">
                 <a:solidFill>
                   <a:srgbClr val="0F172A"/>
                 </a:solidFill>
@@ -7868,13 +7829,13 @@
       </p:sp>
       <p:sp>
         <p:nvSpPr>
-          <p:cNvPr id="29" name="TextBox 28"/>
+          <p:cNvPr id="28" name="TextBox 27"/>
           <p:cNvSpPr txBox="1"/>
           <p:nvPr/>
         </p:nvSpPr>
         <p:spPr>
           <a:xfrm>
-            <a:off x="731520" y="4864608"/>
+            <a:off x="731520" y="4855464"/>
             <a:ext cx="5303520" cy="219456"/>
           </a:xfrm>
           <a:prstGeom prst="rect">
@@ -7907,15 +7868,15 @@
       </p:sp>
       <p:graphicFrame>
         <p:nvGraphicFramePr>
-          <p:cNvPr id="30" name="Table 29"/>
+          <p:cNvPr id="29" name="Table 28"/>
           <p:cNvGraphicFramePr>
             <a:graphicFrameLocks noGrp="1"/>
           </p:cNvGraphicFramePr>
           <p:nvPr/>
         </p:nvGraphicFramePr>
         <p:xfrm>
-          <a:off x="731520" y="5065776"/>
-          <a:ext cx="10728651" cy="1289303"/>
+          <a:off x="731520" y="5056632"/>
+          <a:ext cx="10728651" cy="1298447"/>
         </p:xfrm>
         <a:graphic>
           <a:graphicData uri="http://schemas.openxmlformats.org/drawingml/2006/table">
@@ -7932,7 +7893,7 @@
                 <a:gridCol w="2019511"/>
                 <a:gridCol w="1514633"/>
               </a:tblGrid>
-              <a:tr h="257860">
+              <a:tr h="259689">
                 <a:tc>
                   <a:txBody>
                     <a:bodyPr wrap="square" lIns="73152" rIns="73152"/>
@@ -8123,7 +8084,7 @@
                   </a:tcPr>
                 </a:tc>
               </a:tr>
-              <a:tr h="257860">
+              <a:tr h="259689">
                 <a:tc>
                   <a:txBody>
                     <a:bodyPr wrap="square" lIns="73152" rIns="73152"/>
@@ -8314,7 +8275,7 @@
                   </a:tcPr>
                 </a:tc>
               </a:tr>
-              <a:tr h="257860">
+              <a:tr h="259689">
                 <a:tc>
                   <a:txBody>
                     <a:bodyPr wrap="square" lIns="73152" rIns="73152"/>
@@ -8505,7 +8466,7 @@
                   </a:tcPr>
                 </a:tc>
               </a:tr>
-              <a:tr h="257860">
+              <a:tr h="259689">
                 <a:tc>
                   <a:txBody>
                     <a:bodyPr wrap="square" lIns="73152" rIns="73152"/>
@@ -8696,7 +8657,7 @@
                   </a:tcPr>
                 </a:tc>
               </a:tr>
-              <a:tr h="257863">
+              <a:tr h="259691">
                 <a:tc>
                   <a:txBody>
                     <a:bodyPr wrap="square" lIns="73152" rIns="73152"/>
@@ -9239,10 +9200,36 @@
           </a:fontRef>
         </p:style>
         <p:txBody>
-          <a:bodyPr rtlCol="0" anchor="ctr" lIns="182880" tIns="73152"/>
-          <a:lstStyle/>
-          <a:p>
-            <a:pPr algn="ctr">
+          <a:bodyPr rtlCol="0" anchor="ctr"/>
+          <a:lstStyle/>
+          <a:p>
+            <a:pPr algn="ctr"/>
+          </a:p>
+        </p:txBody>
+      </p:sp>
+      <p:sp>
+        <p:nvSpPr>
+          <p:cNvPr id="10" name="TextBox 9"/>
+          <p:cNvSpPr txBox="1"/>
+          <p:nvPr/>
+        </p:nvSpPr>
+        <p:spPr>
+          <a:xfrm>
+            <a:off x="877824" y="1554480"/>
+            <a:ext cx="6705295" cy="329184"/>
+          </a:xfrm>
+          <a:prstGeom prst="rect">
+            <a:avLst/>
+          </a:prstGeom>
+          <a:noFill/>
+        </p:spPr>
+        <p:txBody>
+          <a:bodyPr wrap="square" lIns="0" rIns="0" tIns="0" bIns="0">
+            <a:spAutoFit/>
+          </a:bodyPr>
+          <a:lstStyle/>
+          <a:p>
+            <a:pPr>
               <a:spcAft>
                 <a:spcPts val="200"/>
               </a:spcAft>
@@ -9261,7 +9248,7 @@
       </p:sp>
       <p:sp>
         <p:nvSpPr>
-          <p:cNvPr id="10" name="Rounded Rectangle 9"/>
+          <p:cNvPr id="11" name="Rounded Rectangle 10"/>
           <p:cNvSpPr/>
           <p:nvPr/>
         </p:nvSpPr>
@@ -9313,7 +9300,7 @@
       </p:sp>
       <p:sp>
         <p:nvSpPr>
-          <p:cNvPr id="11" name="Right Arrow 10"/>
+          <p:cNvPr id="12" name="Right Arrow 11"/>
           <p:cNvSpPr/>
           <p:nvPr/>
         </p:nvSpPr>
@@ -9356,7 +9343,7 @@
       </p:sp>
       <p:sp>
         <p:nvSpPr>
-          <p:cNvPr id="12" name="Rounded Rectangle 11"/>
+          <p:cNvPr id="13" name="Rounded Rectangle 12"/>
           <p:cNvSpPr/>
           <p:nvPr/>
         </p:nvSpPr>
@@ -9408,7 +9395,7 @@
       </p:sp>
       <p:sp>
         <p:nvSpPr>
-          <p:cNvPr id="13" name="Rounded Rectangle 12"/>
+          <p:cNvPr id="14" name="Rounded Rectangle 13"/>
           <p:cNvSpPr/>
           <p:nvPr/>
         </p:nvSpPr>
@@ -9453,7 +9440,7 @@
       </p:sp>
       <p:sp>
         <p:nvSpPr>
-          <p:cNvPr id="14" name="TextBox 13"/>
+          <p:cNvPr id="15" name="TextBox 14"/>
           <p:cNvSpPr txBox="1"/>
           <p:nvPr/>
         </p:nvSpPr>
@@ -9492,14 +9479,14 @@
       </p:sp>
       <p:sp>
         <p:nvSpPr>
-          <p:cNvPr id="15" name="Rounded Rectangle 14"/>
+          <p:cNvPr id="16" name="Rounded Rectangle 15"/>
           <p:cNvSpPr/>
           <p:nvPr/>
         </p:nvSpPr>
         <p:spPr>
           <a:xfrm>
             <a:off x="987552" y="5347411"/>
-            <a:ext cx="892915" cy="669340"/>
+            <a:ext cx="1964413" cy="669340"/>
           </a:xfrm>
           <a:prstGeom prst="roundRect">
             <a:avLst/>
@@ -9546,14 +9533,14 @@
       </p:sp>
       <p:sp>
         <p:nvSpPr>
-          <p:cNvPr id="16" name="Rounded Rectangle 15"/>
+          <p:cNvPr id="17" name="Rounded Rectangle 16"/>
           <p:cNvSpPr/>
           <p:nvPr/>
         </p:nvSpPr>
         <p:spPr>
           <a:xfrm>
             <a:off x="987552" y="4641494"/>
-            <a:ext cx="1785830" cy="669340"/>
+            <a:ext cx="2589454" cy="669340"/>
           </a:xfrm>
           <a:prstGeom prst="roundRect">
             <a:avLst/>
@@ -9611,14 +9598,14 @@
       </p:sp>
       <p:sp>
         <p:nvSpPr>
-          <p:cNvPr id="17" name="Rounded Rectangle 16"/>
+          <p:cNvPr id="18" name="Rounded Rectangle 17"/>
           <p:cNvSpPr/>
           <p:nvPr/>
         </p:nvSpPr>
         <p:spPr>
           <a:xfrm>
             <a:off x="987552" y="3935577"/>
-            <a:ext cx="2678745" cy="669340"/>
+            <a:ext cx="3214494" cy="669340"/>
           </a:xfrm>
           <a:prstGeom prst="roundRect">
             <a:avLst/>
@@ -9665,14 +9652,14 @@
       </p:sp>
       <p:sp>
         <p:nvSpPr>
-          <p:cNvPr id="18" name="Rounded Rectangle 17"/>
+          <p:cNvPr id="19" name="Rounded Rectangle 18"/>
           <p:cNvSpPr/>
           <p:nvPr/>
         </p:nvSpPr>
         <p:spPr>
           <a:xfrm>
             <a:off x="987552" y="3229660"/>
-            <a:ext cx="3571661" cy="669340"/>
+            <a:ext cx="3839535" cy="669340"/>
           </a:xfrm>
           <a:prstGeom prst="roundRect">
             <a:avLst/>
@@ -9730,7 +9717,7 @@
       </p:sp>
       <p:sp>
         <p:nvSpPr>
-          <p:cNvPr id="19" name="Rounded Rectangle 18"/>
+          <p:cNvPr id="20" name="Rounded Rectangle 19"/>
           <p:cNvSpPr/>
           <p:nvPr/>
         </p:nvSpPr>
@@ -9784,7 +9771,7 @@
       </p:sp>
       <p:sp>
         <p:nvSpPr>
-          <p:cNvPr id="20" name="Rounded Rectangle 19"/>
+          <p:cNvPr id="21" name="Rounded Rectangle 20"/>
           <p:cNvSpPr/>
           <p:nvPr/>
         </p:nvSpPr>
@@ -9829,7 +9816,7 @@
       </p:sp>
       <p:sp>
         <p:nvSpPr>
-          <p:cNvPr id="21" name="Rectangle 20"/>
+          <p:cNvPr id="22" name="Rectangle 21"/>
           <p:cNvSpPr/>
           <p:nvPr/>
         </p:nvSpPr>
@@ -9885,7 +9872,7 @@
       </p:sp>
       <p:sp>
         <p:nvSpPr>
-          <p:cNvPr id="22" name="Rounded Rectangle 21"/>
+          <p:cNvPr id="23" name="Rounded Rectangle 22"/>
           <p:cNvSpPr/>
           <p:nvPr/>
         </p:nvSpPr>
@@ -9930,14 +9917,57 @@
       </p:sp>
       <p:sp>
         <p:nvSpPr>
-          <p:cNvPr id="23" name="TextBox 22"/>
+          <p:cNvPr id="24" name="Rounded Rectangle 23"/>
+          <p:cNvSpPr/>
+          <p:nvPr/>
+        </p:nvSpPr>
+        <p:spPr>
+          <a:xfrm>
+            <a:off x="5726448" y="2523744"/>
+            <a:ext cx="73152" cy="619963"/>
+          </a:xfrm>
+          <a:prstGeom prst="roundRect">
+            <a:avLst/>
+          </a:prstGeom>
+          <a:solidFill>
+            <a:srgbClr val="DC2626"/>
+          </a:solidFill>
+          <a:ln>
+            <a:noFill/>
+          </a:ln>
+        </p:spPr>
+        <p:style>
+          <a:lnRef idx="1">
+            <a:schemeClr val="accent1"/>
+          </a:lnRef>
+          <a:fillRef idx="3">
+            <a:schemeClr val="accent1"/>
+          </a:fillRef>
+          <a:effectRef idx="2">
+            <a:schemeClr val="accent1"/>
+          </a:effectRef>
+          <a:fontRef idx="minor">
+            <a:schemeClr val="lt1"/>
+          </a:fontRef>
+        </p:style>
+        <p:txBody>
+          <a:bodyPr rtlCol="0" anchor="ctr"/>
+          <a:lstStyle/>
+          <a:p>
+            <a:pPr algn="ctr"/>
+          </a:p>
+        </p:txBody>
+      </p:sp>
+      <p:sp>
+        <p:nvSpPr>
+          <p:cNvPr id="25" name="TextBox 24"/>
           <p:cNvSpPr txBox="1"/>
           <p:nvPr/>
         </p:nvSpPr>
         <p:spPr>
           <a:xfrm>
-            <a:off x="5763024" y="2523744"/>
-            <a:ext cx="5393579" cy="619963"/>
+            <a:off x="5854464" y="2523744"/>
+            <a:ext cx="5283851" cy="619963"/>
           </a:xfrm>
           <a:prstGeom prst="rect">
             <a:avLst/>
@@ -9957,7 +9987,7 @@
                 </a:solidFill>
                 <a:latin typeface="Inter"/>
               </a:rPr>
-              <a:t>Process &amp; Execution  [P1]</a:t>
+              <a:t>Process &amp; Execution   [P1]</a:t>
             </a:r>
           </a:p>
           <a:p>
@@ -9968,7 +9998,7 @@
                 </a:solidFill>
                 <a:latin typeface="Inter"/>
               </a:rPr>
-              <a:t>Current: 2.1 / 5.0  ➔  Target: 4.3 / 5.0 (Gap: +2.2)</a:t>
+              <a:t>Current: 2.1 / 5.0   ➔   Target: 4.3 / 5.0  (Gap: +2.2)</a:t>
             </a:r>
           </a:p>
           <a:p>
@@ -9979,7 +10009,7 @@
                 </a:solidFill>
                 <a:latin typeface="Inter"/>
               </a:rPr>
-              <a:t>Gap: Paper travel cards &amp; manual dispatch</a:t>
+              <a:t>▸ Gap: Paper travel cards &amp; manual dispatch</a:t>
             </a:r>
           </a:p>
           <a:p>
@@ -9990,14 +10020,14 @@
                 </a:solidFill>
                 <a:latin typeface="Inter"/>
               </a:rPr>
-              <a:t>Intervention: Deploy MES automated dispatch &amp; digital traveler</a:t>
-            </a:r>
-          </a:p>
-        </p:txBody>
-      </p:sp>
-      <p:sp>
-        <p:nvSpPr>
-          <p:cNvPr id="24" name="Rounded Rectangle 23"/>
+              <a:t>✓ Action: Deploy MES automated dispatch &amp; digital traveler</a:t>
+            </a:r>
+          </a:p>
+        </p:txBody>
+      </p:sp>
+      <p:sp>
+        <p:nvSpPr>
+          <p:cNvPr id="26" name="Rounded Rectangle 25"/>
           <p:cNvSpPr/>
           <p:nvPr/>
         </p:nvSpPr>
@@ -10042,14 +10072,57 @@
       </p:sp>
       <p:sp>
         <p:nvSpPr>
-          <p:cNvPr id="25" name="TextBox 24"/>
+          <p:cNvPr id="27" name="Rounded Rectangle 26"/>
+          <p:cNvSpPr/>
+          <p:nvPr/>
+        </p:nvSpPr>
+        <p:spPr>
+          <a:xfrm>
+            <a:off x="5726448" y="3253435"/>
+            <a:ext cx="73152" cy="619963"/>
+          </a:xfrm>
+          <a:prstGeom prst="roundRect">
+            <a:avLst/>
+          </a:prstGeom>
+          <a:solidFill>
+            <a:srgbClr val="DC2626"/>
+          </a:solidFill>
+          <a:ln>
+            <a:noFill/>
+          </a:ln>
+        </p:spPr>
+        <p:style>
+          <a:lnRef idx="1">
+            <a:schemeClr val="accent1"/>
+          </a:lnRef>
+          <a:fillRef idx="3">
+            <a:schemeClr val="accent1"/>
+          </a:fillRef>
+          <a:effectRef idx="2">
+            <a:schemeClr val="accent1"/>
+          </a:effectRef>
+          <a:fontRef idx="minor">
+            <a:schemeClr val="lt1"/>
+          </a:fontRef>
+        </p:style>
+        <p:txBody>
+          <a:bodyPr rtlCol="0" anchor="ctr"/>
+          <a:lstStyle/>
+          <a:p>
+            <a:pPr algn="ctr"/>
+          </a:p>
+        </p:txBody>
+      </p:sp>
+      <p:sp>
+        <p:nvSpPr>
+          <p:cNvPr id="28" name="TextBox 27"/>
           <p:cNvSpPr txBox="1"/>
           <p:nvPr/>
         </p:nvSpPr>
         <p:spPr>
           <a:xfrm>
-            <a:off x="5763024" y="3253435"/>
-            <a:ext cx="5393579" cy="619963"/>
+            <a:off x="5854464" y="3253435"/>
+            <a:ext cx="5283851" cy="619963"/>
           </a:xfrm>
           <a:prstGeom prst="rect">
             <a:avLst/>
@@ -10069,7 +10142,7 @@
                 </a:solidFill>
                 <a:latin typeface="Inter"/>
               </a:rPr>
-              <a:t>Data &amp; Genealogy  [P1]</a:t>
+              <a:t>Data &amp; Genealogy   [P1]</a:t>
             </a:r>
           </a:p>
           <a:p>
@@ -10080,7 +10153,7 @@
                 </a:solidFill>
                 <a:latin typeface="Inter"/>
               </a:rPr>
-              <a:t>Current: 2.3 / 5.0  ➔  Target: 4.5 / 5.0 (Gap: +2.2)</a:t>
+              <a:t>Current: 2.3 / 5.0   ➔   Target: 4.5 / 5.0  (Gap: +2.2)</a:t>
             </a:r>
           </a:p>
           <a:p>
@@ -10091,7 +10164,7 @@
                 </a:solidFill>
                 <a:latin typeface="Inter"/>
               </a:rPr>
-              <a:t>Gap: Missing component-to-serial batch linkage</a:t>
+              <a:t>▸ Gap: Missing component-to-serial batch linkage</a:t>
             </a:r>
           </a:p>
           <a:p>
@@ -10102,14 +10175,14 @@
                 </a:solidFill>
                 <a:latin typeface="Inter"/>
               </a:rPr>
-              <a:t>Intervention: Automated barcode &amp; OPC-UA genealogy binding</a:t>
-            </a:r>
-          </a:p>
-        </p:txBody>
-      </p:sp>
-      <p:sp>
-        <p:nvSpPr>
-          <p:cNvPr id="26" name="Rounded Rectangle 25"/>
+              <a:t>✓ Action: Automated barcode &amp; OPC-UA genealogy binding</a:t>
+            </a:r>
+          </a:p>
+        </p:txBody>
+      </p:sp>
+      <p:sp>
+        <p:nvSpPr>
+          <p:cNvPr id="29" name="Rounded Rectangle 28"/>
           <p:cNvSpPr/>
           <p:nvPr/>
         </p:nvSpPr>
@@ -10154,14 +10227,57 @@
       </p:sp>
       <p:sp>
         <p:nvSpPr>
-          <p:cNvPr id="27" name="TextBox 26"/>
+          <p:cNvPr id="30" name="Rounded Rectangle 29"/>
+          <p:cNvSpPr/>
+          <p:nvPr/>
+        </p:nvSpPr>
+        <p:spPr>
+          <a:xfrm>
+            <a:off x="5726448" y="3983126"/>
+            <a:ext cx="73152" cy="619963"/>
+          </a:xfrm>
+          <a:prstGeom prst="roundRect">
+            <a:avLst/>
+          </a:prstGeom>
+          <a:solidFill>
+            <a:srgbClr val="D97706"/>
+          </a:solidFill>
+          <a:ln>
+            <a:noFill/>
+          </a:ln>
+        </p:spPr>
+        <p:style>
+          <a:lnRef idx="1">
+            <a:schemeClr val="accent1"/>
+          </a:lnRef>
+          <a:fillRef idx="3">
+            <a:schemeClr val="accent1"/>
+          </a:fillRef>
+          <a:effectRef idx="2">
+            <a:schemeClr val="accent1"/>
+          </a:effectRef>
+          <a:fontRef idx="minor">
+            <a:schemeClr val="lt1"/>
+          </a:fontRef>
+        </p:style>
+        <p:txBody>
+          <a:bodyPr rtlCol="0" anchor="ctr"/>
+          <a:lstStyle/>
+          <a:p>
+            <a:pPr algn="ctr"/>
+          </a:p>
+        </p:txBody>
+      </p:sp>
+      <p:sp>
+        <p:nvSpPr>
+          <p:cNvPr id="31" name="TextBox 30"/>
           <p:cNvSpPr txBox="1"/>
           <p:nvPr/>
         </p:nvSpPr>
         <p:spPr>
           <a:xfrm>
-            <a:off x="5763024" y="3983126"/>
-            <a:ext cx="5393579" cy="619963"/>
+            <a:off x="5854464" y="3983126"/>
+            <a:ext cx="5283851" cy="619963"/>
           </a:xfrm>
           <a:prstGeom prst="rect">
             <a:avLst/>
@@ -10181,7 +10297,7 @@
                 </a:solidFill>
                 <a:latin typeface="Inter"/>
               </a:rPr>
-              <a:t>SAP Clean Core  [P2]</a:t>
+              <a:t>SAP Clean Core   [P2]</a:t>
             </a:r>
           </a:p>
           <a:p>
@@ -10192,7 +10308,7 @@
                 </a:solidFill>
                 <a:latin typeface="Inter"/>
               </a:rPr>
-              <a:t>Current: 2.6 / 5.0  ➔  Target: 4.2 / 5.0 (Gap: +1.6)</a:t>
+              <a:t>Current: 2.6 / 5.0   ➔   Target: 4.2 / 5.0  (Gap: +1.6)</a:t>
             </a:r>
           </a:p>
           <a:p>
@@ -10203,7 +10319,7 @@
                 </a:solidFill>
                 <a:latin typeface="Inter"/>
               </a:rPr>
-              <a:t>Gap: Excess custom Z-tables blocking cloud upgrade</a:t>
+              <a:t>▸ Gap: Excess custom Z-tables blocking cloud upgrade</a:t>
             </a:r>
           </a:p>
           <a:p>
@@ -10214,14 +10330,14 @@
                 </a:solidFill>
                 <a:latin typeface="Inter"/>
               </a:rPr>
-              <a:t>Intervention: Migrate custom code to BTP event mesh</a:t>
-            </a:r>
-          </a:p>
-        </p:txBody>
-      </p:sp>
-      <p:sp>
-        <p:nvSpPr>
-          <p:cNvPr id="28" name="Rounded Rectangle 27"/>
+              <a:t>✓ Action: Migrate custom code to BTP event mesh</a:t>
+            </a:r>
+          </a:p>
+        </p:txBody>
+      </p:sp>
+      <p:sp>
+        <p:nvSpPr>
+          <p:cNvPr id="32" name="Rounded Rectangle 31"/>
           <p:cNvSpPr/>
           <p:nvPr/>
         </p:nvSpPr>
@@ -10266,14 +10382,57 @@
       </p:sp>
       <p:sp>
         <p:nvSpPr>
-          <p:cNvPr id="29" name="TextBox 28"/>
+          <p:cNvPr id="33" name="Rounded Rectangle 32"/>
+          <p:cNvSpPr/>
+          <p:nvPr/>
+        </p:nvSpPr>
+        <p:spPr>
+          <a:xfrm>
+            <a:off x="5726448" y="4712817"/>
+            <a:ext cx="73152" cy="619963"/>
+          </a:xfrm>
+          <a:prstGeom prst="roundRect">
+            <a:avLst/>
+          </a:prstGeom>
+          <a:solidFill>
+            <a:srgbClr val="DC2626"/>
+          </a:solidFill>
+          <a:ln>
+            <a:noFill/>
+          </a:ln>
+        </p:spPr>
+        <p:style>
+          <a:lnRef idx="1">
+            <a:schemeClr val="accent1"/>
+          </a:lnRef>
+          <a:fillRef idx="3">
+            <a:schemeClr val="accent1"/>
+          </a:fillRef>
+          <a:effectRef idx="2">
+            <a:schemeClr val="accent1"/>
+          </a:effectRef>
+          <a:fontRef idx="minor">
+            <a:schemeClr val="lt1"/>
+          </a:fontRef>
+        </p:style>
+        <p:txBody>
+          <a:bodyPr rtlCol="0" anchor="ctr"/>
+          <a:lstStyle/>
+          <a:p>
+            <a:pPr algn="ctr"/>
+          </a:p>
+        </p:txBody>
+      </p:sp>
+      <p:sp>
+        <p:nvSpPr>
+          <p:cNvPr id="34" name="TextBox 33"/>
           <p:cNvSpPr txBox="1"/>
           <p:nvPr/>
         </p:nvSpPr>
         <p:spPr>
           <a:xfrm>
-            <a:off x="5763024" y="4712817"/>
-            <a:ext cx="5393579" cy="619963"/>
+            <a:off x="5854464" y="4712817"/>
+            <a:ext cx="5283851" cy="619963"/>
           </a:xfrm>
           <a:prstGeom prst="rect">
             <a:avLst/>
@@ -10293,7 +10452,7 @@
                 </a:solidFill>
                 <a:latin typeface="Inter"/>
               </a:rPr>
-              <a:t>Quality &amp; Rework  [P1]</a:t>
+              <a:t>Quality &amp; Rework   [P1]</a:t>
             </a:r>
           </a:p>
           <a:p>
@@ -10304,7 +10463,7 @@
                 </a:solidFill>
                 <a:latin typeface="Inter"/>
               </a:rPr>
-              <a:t>Current: 2.2 / 5.0  ➔  Target: 4.0 / 5.0 (Gap: +1.8)</a:t>
+              <a:t>Current: 2.2 / 5.0   ➔   Target: 4.0 / 5.0  (Gap: +1.8)</a:t>
             </a:r>
           </a:p>
           <a:p>
@@ -10315,7 +10474,7 @@
                 </a:solidFill>
                 <a:latin typeface="Inter"/>
               </a:rPr>
-              <a:t>Gap: Delayed defect logging &amp; missing CAPA loops</a:t>
+              <a:t>▸ Gap: Delayed defect logging &amp; missing CAPA loops</a:t>
             </a:r>
           </a:p>
           <a:p>
@@ -10326,14 +10485,14 @@
                 </a:solidFill>
                 <a:latin typeface="Inter"/>
               </a:rPr>
-              <a:t>Intervention: Closed-loop digital inspection interlocks</a:t>
-            </a:r>
-          </a:p>
-        </p:txBody>
-      </p:sp>
-      <p:sp>
-        <p:nvSpPr>
-          <p:cNvPr id="30" name="Rounded Rectangle 29"/>
+              <a:t>✓ Action: Closed-loop digital inspection interlocks</a:t>
+            </a:r>
+          </a:p>
+        </p:txBody>
+      </p:sp>
+      <p:sp>
+        <p:nvSpPr>
+          <p:cNvPr id="35" name="Rounded Rectangle 34"/>
           <p:cNvSpPr/>
           <p:nvPr/>
         </p:nvSpPr>
@@ -10378,14 +10537,57 @@
       </p:sp>
       <p:sp>
         <p:nvSpPr>
-          <p:cNvPr id="31" name="TextBox 30"/>
+          <p:cNvPr id="36" name="Rounded Rectangle 35"/>
+          <p:cNvSpPr/>
+          <p:nvPr/>
+        </p:nvSpPr>
+        <p:spPr>
+          <a:xfrm>
+            <a:off x="5726448" y="5442508"/>
+            <a:ext cx="73152" cy="619963"/>
+          </a:xfrm>
+          <a:prstGeom prst="roundRect">
+            <a:avLst/>
+          </a:prstGeom>
+          <a:solidFill>
+            <a:srgbClr val="D97706"/>
+          </a:solidFill>
+          <a:ln>
+            <a:noFill/>
+          </a:ln>
+        </p:spPr>
+        <p:style>
+          <a:lnRef idx="1">
+            <a:schemeClr val="accent1"/>
+          </a:lnRef>
+          <a:fillRef idx="3">
+            <a:schemeClr val="accent1"/>
+          </a:fillRef>
+          <a:effectRef idx="2">
+            <a:schemeClr val="accent1"/>
+          </a:effectRef>
+          <a:fontRef idx="minor">
+            <a:schemeClr val="lt1"/>
+          </a:fontRef>
+        </p:style>
+        <p:txBody>
+          <a:bodyPr rtlCol="0" anchor="ctr"/>
+          <a:lstStyle/>
+          <a:p>
+            <a:pPr algn="ctr"/>
+          </a:p>
+        </p:txBody>
+      </p:sp>
+      <p:sp>
+        <p:nvSpPr>
+          <p:cNvPr id="37" name="TextBox 36"/>
           <p:cNvSpPr txBox="1"/>
           <p:nvPr/>
         </p:nvSpPr>
         <p:spPr>
           <a:xfrm>
-            <a:off x="5763024" y="5442508"/>
-            <a:ext cx="5393579" cy="619963"/>
+            <a:off x="5854464" y="5442508"/>
+            <a:ext cx="5283851" cy="619963"/>
           </a:xfrm>
           <a:prstGeom prst="rect">
             <a:avLst/>
@@ -10405,7 +10607,7 @@
                 </a:solidFill>
                 <a:latin typeface="Inter"/>
               </a:rPr>
-              <a:t>Governance &amp; RACI  [P2]</a:t>
+              <a:t>Governance &amp; RACI   [P2]</a:t>
             </a:r>
           </a:p>
           <a:p>
@@ -10416,7 +10618,7 @@
                 </a:solidFill>
                 <a:latin typeface="Inter"/>
               </a:rPr>
-              <a:t>Current: 2.8 / 5.0  ➔  Target: 4.0 / 5.0 (Gap: +1.2)</a:t>
+              <a:t>Current: 2.8 / 5.0   ➔   Target: 4.0 / 5.0  (Gap: +1.2)</a:t>
             </a:r>
           </a:p>
           <a:p>
@@ -10427,7 +10629,7 @@
                 </a:solidFill>
                 <a:latin typeface="Inter"/>
               </a:rPr>
-              <a:t>Gap: Ambiguous IT/OT boundary ownership</a:t>
+              <a:t>▸ Gap: Ambiguous IT/OT boundary ownership</a:t>
             </a:r>
           </a:p>
           <a:p>
@@ -10438,7 +10640,7 @@
                 </a:solidFill>
                 <a:latin typeface="Inter"/>
               </a:rPr>
-              <a:t>Intervention: Formalize unified IT/OT operating charter</a:t>
+              <a:t>✓ Action: Formalize unified IT/OT operating charter</a:t>
             </a:r>
           </a:p>
         </p:txBody>
@@ -11249,7 +11451,7 @@
         <p:spPr>
           <a:xfrm>
             <a:off x="950976" y="2267712"/>
-            <a:ext cx="2999140" cy="3392423"/>
+            <a:ext cx="2999140" cy="2377439"/>
           </a:xfrm>
           <a:prstGeom prst="rect">
             <a:avLst/>
@@ -11341,25 +11543,74 @@
               <a:t>✗  Delayed inventory confirmation (2-3 day lag)</a:t>
             </a:r>
           </a:p>
-          <a:p>
-            <a:pPr>
-              <a:spcBef>
-                <a:spcPts val="800"/>
-              </a:spcBef>
-              <a:spcAft>
-                <a:spcPts val="200"/>
-              </a:spcAft>
-            </a:pPr>
-            <a:r>
-              <a:rPr sz="850" b="1" i="0">
-                <a:solidFill>
-                  <a:srgbClr val="64748B"/>
-                </a:solidFill>
-                <a:latin typeface="Inter"/>
-              </a:rPr>
-              <a:t>BASELINE METRICS</a:t>
-            </a:r>
-          </a:p>
+        </p:txBody>
+      </p:sp>
+      <p:sp>
+        <p:nvSpPr>
+          <p:cNvPr id="13" name="Rounded Rectangle 12"/>
+          <p:cNvSpPr/>
+          <p:nvPr/>
+        </p:nvSpPr>
+        <p:spPr>
+          <a:xfrm>
+            <a:off x="932688" y="4389120"/>
+            <a:ext cx="3035716" cy="1234440"/>
+          </a:xfrm>
+          <a:prstGeom prst="roundRect">
+            <a:avLst/>
+          </a:prstGeom>
+          <a:solidFill>
+            <a:srgbClr val="F1F5F9"/>
+          </a:solidFill>
+          <a:ln w="9525">
+            <a:solidFill>
+              <a:srgbClr val="E2E8F0"/>
+            </a:solidFill>
+          </a:ln>
+        </p:spPr>
+        <p:style>
+          <a:lnRef idx="1">
+            <a:schemeClr val="accent1"/>
+          </a:lnRef>
+          <a:fillRef idx="3">
+            <a:schemeClr val="accent1"/>
+          </a:fillRef>
+          <a:effectRef idx="2">
+            <a:schemeClr val="accent1"/>
+          </a:effectRef>
+          <a:fontRef idx="minor">
+            <a:schemeClr val="lt1"/>
+          </a:fontRef>
+        </p:style>
+        <p:txBody>
+          <a:bodyPr rtlCol="0" anchor="ctr"/>
+          <a:lstStyle/>
+          <a:p>
+            <a:pPr algn="ctr"/>
+          </a:p>
+        </p:txBody>
+      </p:sp>
+      <p:sp>
+        <p:nvSpPr>
+          <p:cNvPr id="14" name="TextBox 13"/>
+          <p:cNvSpPr txBox="1"/>
+          <p:nvPr/>
+        </p:nvSpPr>
+        <p:spPr>
+          <a:xfrm>
+            <a:off x="987552" y="4443983"/>
+            <a:ext cx="2925988" cy="1115568"/>
+          </a:xfrm>
+          <a:prstGeom prst="rect">
+            <a:avLst/>
+          </a:prstGeom>
+          <a:noFill/>
+        </p:spPr>
+        <p:txBody>
+          <a:bodyPr wrap="square" lIns="0" tIns="0" rIns="0" bIns="0">
+            <a:spAutoFit/>
+          </a:bodyPr>
+          <a:lstStyle/>
           <a:p>
             <a:pPr>
               <a:spcAft>
@@ -11367,13 +11618,13 @@
               </a:spcAft>
             </a:pPr>
             <a:r>
-              <a:rPr sz="819" b="1" i="0">
+              <a:rPr sz="850" b="1" i="0">
                 <a:solidFill>
                   <a:srgbClr val="64748B"/>
                 </a:solidFill>
                 <a:latin typeface="Inter"/>
               </a:rPr>
-              <a:t>• WIP Latency: 4.8 Days</a:t>
+              <a:t>BASELINE FRICTION METRICS</a:t>
             </a:r>
           </a:p>
           <a:p>
@@ -11385,11 +11636,11 @@
             <a:r>
               <a:rPr sz="819" b="1" i="0">
                 <a:solidFill>
-                  <a:srgbClr val="64748B"/>
-                </a:solidFill>
-                <a:latin typeface="Inter"/>
-              </a:rPr>
-              <a:t>• Scrap Rate: 4.2%</a:t>
+                  <a:srgbClr val="DC2626"/>
+                </a:solidFill>
+                <a:latin typeface="Inter"/>
+              </a:rPr>
+              <a:t>• WIP Latency: 4.8 Days</a:t>
             </a:r>
           </a:p>
           <a:p>
@@ -11401,7 +11652,23 @@
             <a:r>
               <a:rPr sz="819" b="1" i="0">
                 <a:solidFill>
-                  <a:srgbClr val="64748B"/>
+                  <a:srgbClr val="DC2626"/>
+                </a:solidFill>
+                <a:latin typeface="Inter"/>
+              </a:rPr>
+              <a:t>• Scrap Rate: 4.2%</a:t>
+            </a:r>
+          </a:p>
+          <a:p>
+            <a:pPr>
+              <a:spcAft>
+                <a:spcPts val="200"/>
+              </a:spcAft>
+            </a:pPr>
+            <a:r>
+              <a:rPr sz="819" b="1" i="0">
+                <a:solidFill>
+                  <a:srgbClr val="DC2626"/>
                 </a:solidFill>
                 <a:latin typeface="Inter"/>
               </a:rPr>
@@ -11412,7 +11679,7 @@
       </p:sp>
       <p:sp>
         <p:nvSpPr>
-          <p:cNvPr id="13" name="Right Arrow 12"/>
+          <p:cNvPr id="15" name="Right Arrow 14"/>
           <p:cNvSpPr/>
           <p:nvPr/>
         </p:nvSpPr>
@@ -11455,7 +11722,7 @@
       </p:sp>
       <p:sp>
         <p:nvSpPr>
-          <p:cNvPr id="14" name="Rounded Rectangle 13"/>
+          <p:cNvPr id="16" name="Rounded Rectangle 15"/>
           <p:cNvSpPr/>
           <p:nvPr/>
         </p:nvSpPr>
@@ -11500,7 +11767,7 @@
       </p:sp>
       <p:sp>
         <p:nvSpPr>
-          <p:cNvPr id="15" name="Rectangle 14"/>
+          <p:cNvPr id="17" name="Rectangle 16"/>
           <p:cNvSpPr/>
           <p:nvPr/>
         </p:nvSpPr>
@@ -11556,14 +11823,14 @@
       </p:sp>
       <p:sp>
         <p:nvSpPr>
-          <p:cNvPr id="16" name="TextBox 15"/>
+          <p:cNvPr id="18" name="TextBox 17"/>
           <p:cNvSpPr txBox="1"/>
           <p:nvPr/>
         </p:nvSpPr>
         <p:spPr>
           <a:xfrm>
             <a:off x="4491432" y="2267712"/>
-            <a:ext cx="3428286" cy="3392423"/>
+            <a:ext cx="3428286" cy="2377439"/>
           </a:xfrm>
           <a:prstGeom prst="rect">
             <a:avLst/>
@@ -11655,25 +11922,74 @@
               <a:t>⚙  Unified Industrial Data Fabric &amp; BTP Mesh</a:t>
             </a:r>
           </a:p>
-          <a:p>
-            <a:pPr>
-              <a:spcBef>
-                <a:spcPts val="800"/>
-              </a:spcBef>
-              <a:spcAft>
-                <a:spcPts val="200"/>
-              </a:spcAft>
-            </a:pPr>
-            <a:r>
-              <a:rPr sz="850" b="1" i="0">
-                <a:solidFill>
-                  <a:srgbClr val="0066CC"/>
-                </a:solidFill>
-                <a:latin typeface="Inter"/>
-              </a:rPr>
-              <a:t>ENABLERS &amp; ARCHITECTURE</a:t>
-            </a:r>
-          </a:p>
+        </p:txBody>
+      </p:sp>
+      <p:sp>
+        <p:nvSpPr>
+          <p:cNvPr id="19" name="Rounded Rectangle 18"/>
+          <p:cNvSpPr/>
+          <p:nvPr/>
+        </p:nvSpPr>
+        <p:spPr>
+          <a:xfrm>
+            <a:off x="4473144" y="4389120"/>
+            <a:ext cx="3464862" cy="1234440"/>
+          </a:xfrm>
+          <a:prstGeom prst="roundRect">
+            <a:avLst/>
+          </a:prstGeom>
+          <a:solidFill>
+            <a:srgbClr val="FFFFFF"/>
+          </a:solidFill>
+          <a:ln w="9525">
+            <a:solidFill>
+              <a:srgbClr val="0066CC"/>
+            </a:solidFill>
+          </a:ln>
+        </p:spPr>
+        <p:style>
+          <a:lnRef idx="1">
+            <a:schemeClr val="accent1"/>
+          </a:lnRef>
+          <a:fillRef idx="3">
+            <a:schemeClr val="accent1"/>
+          </a:fillRef>
+          <a:effectRef idx="2">
+            <a:schemeClr val="accent1"/>
+          </a:effectRef>
+          <a:fontRef idx="minor">
+            <a:schemeClr val="lt1"/>
+          </a:fontRef>
+        </p:style>
+        <p:txBody>
+          <a:bodyPr rtlCol="0" anchor="ctr"/>
+          <a:lstStyle/>
+          <a:p>
+            <a:pPr algn="ctr"/>
+          </a:p>
+        </p:txBody>
+      </p:sp>
+      <p:sp>
+        <p:nvSpPr>
+          <p:cNvPr id="20" name="TextBox 19"/>
+          <p:cNvSpPr txBox="1"/>
+          <p:nvPr/>
+        </p:nvSpPr>
+        <p:spPr>
+          <a:xfrm>
+            <a:off x="4528008" y="4443983"/>
+            <a:ext cx="3355134" cy="1115568"/>
+          </a:xfrm>
+          <a:prstGeom prst="rect">
+            <a:avLst/>
+          </a:prstGeom>
+          <a:noFill/>
+        </p:spPr>
+        <p:txBody>
+          <a:bodyPr wrap="square" lIns="0" tIns="0" rIns="0" bIns="0">
+            <a:spAutoFit/>
+          </a:bodyPr>
+          <a:lstStyle/>
           <a:p>
             <a:pPr>
               <a:spcAft>
@@ -11681,13 +11997,13 @@
               </a:spcAft>
             </a:pPr>
             <a:r>
-              <a:rPr sz="819" b="1" i="0">
-                <a:solidFill>
-                  <a:srgbClr val="64748B"/>
-                </a:solidFill>
-                <a:latin typeface="Inter"/>
-              </a:rPr>
-              <a:t>✔ Air-gapped edge buffering</a:t>
+              <a:rPr sz="850" b="1" i="0">
+                <a:solidFill>
+                  <a:srgbClr val="0066CC"/>
+                </a:solidFill>
+                <a:latin typeface="Inter"/>
+              </a:rPr>
+              <a:t>CORE ARCHITECTURAL ENABLERS</a:t>
             </a:r>
           </a:p>
           <a:p>
@@ -11699,11 +12015,11 @@
             <a:r>
               <a:rPr sz="819" b="1" i="0">
                 <a:solidFill>
-                  <a:srgbClr val="64748B"/>
-                </a:solidFill>
-                <a:latin typeface="Inter"/>
-              </a:rPr>
-              <a:t>✔ Deterministic PLC connectors</a:t>
+                  <a:srgbClr val="0F172A"/>
+                </a:solidFill>
+                <a:latin typeface="Inter"/>
+              </a:rPr>
+              <a:t>✔ Air-gapped edge buffering</a:t>
             </a:r>
           </a:p>
           <a:p>
@@ -11715,7 +12031,23 @@
             <a:r>
               <a:rPr sz="819" b="1" i="0">
                 <a:solidFill>
-                  <a:srgbClr val="64748B"/>
+                  <a:srgbClr val="0F172A"/>
+                </a:solidFill>
+                <a:latin typeface="Inter"/>
+              </a:rPr>
+              <a:t>✔ Deterministic PLC connectors</a:t>
+            </a:r>
+          </a:p>
+          <a:p>
+            <a:pPr>
+              <a:spcAft>
+                <a:spcPts val="200"/>
+              </a:spcAft>
+            </a:pPr>
+            <a:r>
+              <a:rPr sz="819" b="1" i="0">
+                <a:solidFill>
+                  <a:srgbClr val="0F172A"/>
                 </a:solidFill>
                 <a:latin typeface="Inter"/>
               </a:rPr>
@@ -11726,7 +12058,7 @@
       </p:sp>
       <p:sp>
         <p:nvSpPr>
-          <p:cNvPr id="17" name="Right Arrow 16"/>
+          <p:cNvPr id="21" name="Right Arrow 20"/>
           <p:cNvSpPr/>
           <p:nvPr/>
         </p:nvSpPr>
@@ -11769,7 +12101,7 @@
       </p:sp>
       <p:sp>
         <p:nvSpPr>
-          <p:cNvPr id="18" name="Rounded Rectangle 17"/>
+          <p:cNvPr id="22" name="Rounded Rectangle 21"/>
           <p:cNvSpPr/>
           <p:nvPr/>
         </p:nvSpPr>
@@ -11814,7 +12146,7 @@
       </p:sp>
       <p:sp>
         <p:nvSpPr>
-          <p:cNvPr id="19" name="Rectangle 18"/>
+          <p:cNvPr id="23" name="Rectangle 22"/>
           <p:cNvSpPr/>
           <p:nvPr/>
         </p:nvSpPr>
@@ -11870,14 +12202,14 @@
       </p:sp>
       <p:sp>
         <p:nvSpPr>
-          <p:cNvPr id="20" name="TextBox 19"/>
+          <p:cNvPr id="24" name="TextBox 23"/>
           <p:cNvSpPr txBox="1"/>
           <p:nvPr/>
         </p:nvSpPr>
         <p:spPr>
           <a:xfrm>
             <a:off x="8461034" y="2267712"/>
-            <a:ext cx="2999140" cy="3392423"/>
+            <a:ext cx="2999140" cy="2377439"/>
           </a:xfrm>
           <a:prstGeom prst="rect">
             <a:avLst/>
@@ -11969,25 +12301,74 @@
               <a:t>✔  Sub-second financial ledger postings</a:t>
             </a:r>
           </a:p>
-          <a:p>
-            <a:pPr>
-              <a:spcBef>
-                <a:spcPts val="800"/>
-              </a:spcBef>
-              <a:spcAft>
-                <a:spcPts val="200"/>
-              </a:spcAft>
-            </a:pPr>
-            <a:r>
-              <a:rPr sz="850" b="1" i="0">
-                <a:solidFill>
-                  <a:srgbClr val="10B981"/>
-                </a:solidFill>
-                <a:latin typeface="Inter"/>
-              </a:rPr>
-              <a:t>MEASURABLE OUTCOMES</a:t>
-            </a:r>
-          </a:p>
+        </p:txBody>
+      </p:sp>
+      <p:sp>
+        <p:nvSpPr>
+          <p:cNvPr id="25" name="Rounded Rectangle 24"/>
+          <p:cNvSpPr/>
+          <p:nvPr/>
+        </p:nvSpPr>
+        <p:spPr>
+          <a:xfrm>
+            <a:off x="8442746" y="4389120"/>
+            <a:ext cx="3035716" cy="1234440"/>
+          </a:xfrm>
+          <a:prstGeom prst="roundRect">
+            <a:avLst/>
+          </a:prstGeom>
+          <a:solidFill>
+            <a:srgbClr val="F1F5F9"/>
+          </a:solidFill>
+          <a:ln w="12700">
+            <a:solidFill>
+              <a:srgbClr val="10B981"/>
+            </a:solidFill>
+          </a:ln>
+        </p:spPr>
+        <p:style>
+          <a:lnRef idx="1">
+            <a:schemeClr val="accent1"/>
+          </a:lnRef>
+          <a:fillRef idx="3">
+            <a:schemeClr val="accent1"/>
+          </a:fillRef>
+          <a:effectRef idx="2">
+            <a:schemeClr val="accent1"/>
+          </a:effectRef>
+          <a:fontRef idx="minor">
+            <a:schemeClr val="lt1"/>
+          </a:fontRef>
+        </p:style>
+        <p:txBody>
+          <a:bodyPr rtlCol="0" anchor="ctr"/>
+          <a:lstStyle/>
+          <a:p>
+            <a:pPr algn="ctr"/>
+          </a:p>
+        </p:txBody>
+      </p:sp>
+      <p:sp>
+        <p:nvSpPr>
+          <p:cNvPr id="26" name="TextBox 25"/>
+          <p:cNvSpPr txBox="1"/>
+          <p:nvPr/>
+        </p:nvSpPr>
+        <p:spPr>
+          <a:xfrm>
+            <a:off x="8497610" y="4443983"/>
+            <a:ext cx="2925988" cy="1115568"/>
+          </a:xfrm>
+          <a:prstGeom prst="rect">
+            <a:avLst/>
+          </a:prstGeom>
+          <a:noFill/>
+        </p:spPr>
+        <p:txBody>
+          <a:bodyPr wrap="square" lIns="0" tIns="0" rIns="0" bIns="0">
+            <a:spAutoFit/>
+          </a:bodyPr>
+          <a:lstStyle/>
           <a:p>
             <a:pPr>
               <a:spcAft>
@@ -11995,13 +12376,13 @@
               </a:spcAft>
             </a:pPr>
             <a:r>
-              <a:rPr sz="819" b="1" i="0">
-                <a:solidFill>
-                  <a:srgbClr val="0F172A"/>
-                </a:solidFill>
-                <a:latin typeface="Inter"/>
-              </a:rPr>
-              <a:t>★ WIP Latency: 1.2 Days (-75%)</a:t>
+              <a:rPr sz="850" b="1" i="0">
+                <a:solidFill>
+                  <a:srgbClr val="10B981"/>
+                </a:solidFill>
+                <a:latin typeface="Inter"/>
+              </a:rPr>
+              <a:t>AUDITED VALUE OUTCOMES</a:t>
             </a:r>
           </a:p>
           <a:p>
@@ -12017,7 +12398,7 @@
                 </a:solidFill>
                 <a:latin typeface="Inter"/>
               </a:rPr>
-              <a:t>★ Scrap Rate: 0.8% (-81%)</a:t>
+              <a:t>★ WIP Latency: 1.2 Days (-75%)</a:t>
             </a:r>
           </a:p>
           <a:p>
@@ -12033,6 +12414,22 @@
                 </a:solidFill>
                 <a:latin typeface="Inter"/>
               </a:rPr>
+              <a:t>★ Scrap Rate: 0.8% (-81%)</a:t>
+            </a:r>
+          </a:p>
+          <a:p>
+            <a:pPr>
+              <a:spcAft>
+                <a:spcPts val="200"/>
+              </a:spcAft>
+            </a:pPr>
+            <a:r>
+              <a:rPr sz="819" b="1" i="0">
+                <a:solidFill>
+                  <a:srgbClr val="0F172A"/>
+                </a:solidFill>
+                <a:latin typeface="Inter"/>
+              </a:rPr>
               <a:t>★ OTIF Delivery: 97.5% (+16 pts)</a:t>
             </a:r>
           </a:p>
@@ -12040,7 +12437,7 @@
       </p:sp>
       <p:sp>
         <p:nvSpPr>
-          <p:cNvPr id="21" name="Rounded Rectangle 20"/>
+          <p:cNvPr id="27" name="Rounded Rectangle 26"/>
           <p:cNvSpPr/>
           <p:nvPr/>
         </p:nvSpPr>
@@ -13264,7 +13661,7 @@
         <p:spPr>
           <a:xfrm>
             <a:off x="6944476" y="1984248"/>
-            <a:ext cx="1294921" cy="1188720"/>
+            <a:ext cx="1489159" cy="1188720"/>
           </a:xfrm>
           <a:prstGeom prst="diamond">
             <a:avLst/>
@@ -13293,8 +13690,20 @@
           </a:fontRef>
         </p:style>
         <p:txBody>
-          <a:bodyPr rtlCol="0" anchor="ctr" wrap="square" lIns="137160" rIns="137160"/>
-          <a:lstStyle/>
+          <a:bodyPr rtlCol="0" anchor="ctr" wrap="square" lIns="36576" rIns="36576" tIns="54864" bIns="54864"/>
+          <a:lstStyle/>
+          <a:p>
+            <a:pPr algn="ctr"/>
+            <a:r>
+              <a:rPr sz="819" b="1" i="0">
+                <a:solidFill>
+                  <a:srgbClr val="0066CC"/>
+                </a:solidFill>
+                <a:latin typeface="Inter"/>
+              </a:rPr>
+              <a:t>GATE</a:t>
+            </a:r>
+          </a:p>
           <a:p>
             <a:pPr algn="ctr">
               <a:spcAft>
@@ -13304,23 +13713,12 @@
             <a:r>
               <a:rPr sz="850" b="1" i="0">
                 <a:solidFill>
-                  <a:srgbClr val="0066CC"/>
-                </a:solidFill>
-                <a:latin typeface="Inter"/>
-              </a:rPr>
-              <a:t>DECISION GATE</a:t>
-            </a:r>
-          </a:p>
-          <a:p>
-            <a:pPr algn="ctr"/>
-            <a:r>
-              <a:rPr sz="1050" b="1" i="0">
-                <a:solidFill>
                   <a:srgbClr val="0F172A"/>
                 </a:solidFill>
                 <a:latin typeface="Inter"/>
               </a:rPr>
-              <a:t>Quality Gate &amp; SPC</a:t>
+              <a:t>QUALITY GATE
+&amp; SPC</a:t>
             </a:r>
           </a:p>
         </p:txBody>
@@ -13333,8 +13731,8 @@
         </p:nvSpPr>
         <p:spPr>
           <a:xfrm>
-            <a:off x="8266829" y="2468879"/>
-            <a:ext cx="146304" cy="219456"/>
+            <a:off x="8470211" y="2468879"/>
+            <a:ext cx="548640" cy="219456"/>
           </a:xfrm>
           <a:prstGeom prst="rightArrow">
             <a:avLst/>
@@ -13376,8 +13774,8 @@
         </p:nvSpPr>
         <p:spPr>
           <a:xfrm>
-            <a:off x="8175389" y="2057400"/>
-            <a:ext cx="548640" cy="219456"/>
+            <a:off x="8506787" y="2304288"/>
+            <a:ext cx="475488" cy="201168"/>
           </a:xfrm>
           <a:prstGeom prst="roundRect">
             <a:avLst/>
@@ -13428,7 +13826,7 @@
         </p:nvSpPr>
         <p:spPr>
           <a:xfrm>
-            <a:off x="8440565" y="1984248"/>
+            <a:off x="9055427" y="1984248"/>
             <a:ext cx="1294921" cy="1188720"/>
           </a:xfrm>
           <a:prstGeom prst="roundRect">
@@ -13473,7 +13871,7 @@
         </p:nvSpPr>
         <p:spPr>
           <a:xfrm>
-            <a:off x="8440565" y="1984248"/>
+            <a:off x="9055427" y="1984248"/>
             <a:ext cx="1294921" cy="256032"/>
           </a:xfrm>
           <a:prstGeom prst="rect">
@@ -13525,7 +13923,7 @@
         </p:nvSpPr>
         <p:spPr>
           <a:xfrm>
-            <a:off x="8513717" y="2276856"/>
+            <a:off x="9128579" y="2276856"/>
             <a:ext cx="1148617" cy="859536"/>
           </a:xfrm>
           <a:prstGeom prst="rect">
@@ -13580,7 +13978,7 @@
         </p:nvSpPr>
         <p:spPr>
           <a:xfrm>
-            <a:off x="9762918" y="2468879"/>
+            <a:off x="10377780" y="2468879"/>
             <a:ext cx="146304" cy="219456"/>
           </a:xfrm>
           <a:prstGeom prst="rightArrow">
@@ -13623,7 +14021,7 @@
         </p:nvSpPr>
         <p:spPr>
           <a:xfrm>
-            <a:off x="9936654" y="1984248"/>
+            <a:off x="10551516" y="1984248"/>
             <a:ext cx="1294921" cy="1188720"/>
           </a:xfrm>
           <a:prstGeom prst="roundRect">
@@ -13668,7 +14066,7 @@
         </p:nvSpPr>
         <p:spPr>
           <a:xfrm>
-            <a:off x="9936654" y="1984248"/>
+            <a:off x="10551516" y="1984248"/>
             <a:ext cx="1294921" cy="256032"/>
           </a:xfrm>
           <a:prstGeom prst="rect">
@@ -13720,7 +14118,7 @@
         </p:nvSpPr>
         <p:spPr>
           <a:xfrm>
-            <a:off x="10009806" y="2276856"/>
+            <a:off x="10624668" y="2276856"/>
             <a:ext cx="1148617" cy="859536"/>
           </a:xfrm>
           <a:prstGeom prst="rect">
@@ -13775,7 +14173,7 @@
         </p:nvSpPr>
         <p:spPr>
           <a:xfrm>
-            <a:off x="7482208" y="3218687"/>
+            <a:off x="7579327" y="3218687"/>
             <a:ext cx="219456" cy="1673351"/>
           </a:xfrm>
           <a:prstGeom prst="downArrow">
@@ -13818,7 +14216,7 @@
         </p:nvSpPr>
         <p:spPr>
           <a:xfrm>
-            <a:off x="7738240" y="3310127"/>
+            <a:off x="7835359" y="3310127"/>
             <a:ext cx="1005840" cy="219456"/>
           </a:xfrm>
           <a:prstGeom prst="roundRect">
@@ -14261,8 +14659,8 @@
         </p:nvSpPr>
         <p:spPr>
           <a:xfrm>
-            <a:off x="10064670" y="4617720"/>
-            <a:ext cx="219456" cy="320040"/>
+            <a:off x="10064670" y="4434840"/>
+            <a:ext cx="219456" cy="502920"/>
           </a:xfrm>
           <a:prstGeom prst="upArrow">
             <a:avLst/>
@@ -14304,8 +14702,8 @@
         </p:nvSpPr>
         <p:spPr>
           <a:xfrm>
-            <a:off x="10302414" y="4526279"/>
-            <a:ext cx="1029745" cy="365760"/>
+            <a:off x="10320702" y="4507992"/>
+            <a:ext cx="1234440" cy="384048"/>
           </a:xfrm>
           <a:prstGeom prst="roundRect">
             <a:avLst/>
@@ -14313,7 +14711,7 @@
           <a:solidFill>
             <a:srgbClr val="EEF2FF"/>
           </a:solidFill>
-          <a:ln>
+          <a:ln w="12700">
             <a:solidFill>
               <a:srgbClr val="D97706"/>
             </a:solidFill>
@@ -14334,7 +14732,7 @@
           </a:fontRef>
         </p:style>
         <p:txBody>
-          <a:bodyPr rtlCol="0" anchor="ctr" wrap="square"/>
+          <a:bodyPr rtlCol="0" anchor="ctr" wrap="square" lIns="36576" rIns="36576" tIns="36576" bIns="36576"/>
           <a:lstStyle/>
           <a:p>
             <a:pPr algn="ctr"/>
@@ -14345,7 +14743,7 @@
                 </a:solidFill>
                 <a:latin typeface="Inter"/>
               </a:rPr>
-              <a:t>CLOSED-LOOP RE-ENTRY
+              <a:t>↺ RE-ENTRY LOOP
 Cleared for Confirmation</a:t>
             </a:r>
           </a:p>
